--- a/CODA-Association/CODAwork2026/CodaWork2026_Talk_2026-05-13.pptx
+++ b/CODA-Association/CODAwork2026/CodaWork2026_Talk_2026-05-13.pptx
@@ -4608,7 +4608,7 @@
                 </a:solidFill>
                 <a:latin typeface="Calibri"/>
               </a:rPr>
-              <a:t>P. Higgins,  Rogue Wave Audio</a:t>
+              <a:t>P. Higgins   ·   Independent researcher   ·   Rogue Wave Audio, Markham, Ontario</a:t>
             </a:r>
           </a:p>
         </p:txBody>
@@ -7198,7 +7198,7 @@
                 </a:solidFill>
                 <a:latin typeface="Calibri"/>
               </a:rPr>
-              <a:t>Carriers (EMBER 9):   coal · gas · oil · nuclear · hydro · wind · solar · bioenergy · other</a:t>
+              <a:t>Carriers (EMBER · 9 on the 8-simplex):   coal · gas · oil · nuclear · hydro · wind · solar · bioenergy · other</a:t>
             </a:r>
           </a:p>
         </p:txBody>
@@ -7339,6 +7339,41 @@
                 <a:latin typeface="Calibri"/>
               </a:rPr>
               <a:t>Beat 1 / 10  ·  1 min  ·  the handshake</a:t>
+            </a:r>
+          </a:p>
+        </p:txBody>
+      </p:sp>
+      <p:sp>
+        <p:nvSpPr>
+          <p:cNvPr id="10" name="TextBox 9"/>
+          <p:cNvSpPr txBox="1"/>
+          <p:nvPr/>
+        </p:nvSpPr>
+        <p:spPr>
+          <a:xfrm>
+            <a:off x="731520" y="2991800"/>
+            <a:ext cx="7680960" cy="274320"/>
+          </a:xfrm>
+          <a:prstGeom prst="rect">
+            <a:avLst/>
+          </a:prstGeom>
+          <a:noFill/>
+        </p:spPr>
+        <p:txBody>
+          <a:bodyPr wrap="square">
+            <a:spAutoFit/>
+          </a:bodyPr>
+          <a:lstStyle/>
+          <a:p>
+            <a:pPr algn="l"/>
+            <a:r>
+              <a:rPr sz="1100" b="0" i="1">
+                <a:solidFill>
+                  <a:srgbClr val="6E6E6E"/>
+                </a:solidFill>
+                <a:latin typeface="Calibri"/>
+              </a:rPr>
+              <a:t>Window  2000–2025   ·   Data:  EMBER  (CC BY 4.0)</a:t>
             </a:r>
           </a:p>
         </p:txBody>
@@ -7883,6 +7918,41 @@
           </a:p>
         </p:txBody>
       </p:sp>
+      <p:sp>
+        <p:nvSpPr>
+          <p:cNvPr id="16" name="TextBox 15"/>
+          <p:cNvSpPr txBox="1"/>
+          <p:nvPr/>
+        </p:nvSpPr>
+        <p:spPr>
+          <a:xfrm>
+            <a:off x="457200" y="1554480"/>
+            <a:ext cx="8229600" cy="256032"/>
+          </a:xfrm>
+          <a:prstGeom prst="rect">
+            <a:avLst/>
+          </a:prstGeom>
+          <a:noFill/>
+        </p:spPr>
+        <p:txBody>
+          <a:bodyPr wrap="square" tIns="0" bIns="0">
+            <a:spAutoFit/>
+          </a:bodyPr>
+          <a:lstStyle/>
+          <a:p>
+            <a:pPr algn="ctr"/>
+            <a:r>
+              <a:rPr sz="1100" i="1">
+                <a:solidFill>
+                  <a:srgbClr val="B4B4B4"/>
+                </a:solidFill>
+                <a:latin typeface="Calibri"/>
+              </a:rPr>
+              <a:t>Monitoring frame:  Magnitude · Identity · Trend · Composition   —   this talk addresses Composition.</a:t>
+            </a:r>
+          </a:p>
+        </p:txBody>
+      </p:sp>
     </p:spTree>
   </p:cSld>
   <p:clrMapOvr>
@@ -8672,6 +8742,41 @@
                 <a:latin typeface="Calibri"/>
               </a:rPr>
               <a:t>Beat 3 / 10  ·  2 min  ·  conservative, well-documented</a:t>
+            </a:r>
+          </a:p>
+        </p:txBody>
+      </p:sp>
+      <p:sp>
+        <p:nvSpPr>
+          <p:cNvPr id="23" name="TextBox 22"/>
+          <p:cNvSpPr txBox="1"/>
+          <p:nvPr/>
+        </p:nvSpPr>
+        <p:spPr>
+          <a:xfrm>
+            <a:off x="457200" y="4544568"/>
+            <a:ext cx="8229600" cy="256032"/>
+          </a:xfrm>
+          <a:prstGeom prst="rect">
+            <a:avLst/>
+          </a:prstGeom>
+          <a:noFill/>
+        </p:spPr>
+        <p:txBody>
+          <a:bodyPr wrap="square" tIns="0" bIns="0">
+            <a:spAutoFit/>
+          </a:bodyPr>
+          <a:lstStyle/>
+          <a:p>
+            <a:pPr algn="ctr"/>
+            <a:r>
+              <a:rPr sz="1100" i="1">
+                <a:solidFill>
+                  <a:srgbClr val="B4B4B4"/>
+                </a:solidFill>
+                <a:latin typeface="Calibri"/>
+              </a:rPr>
+              <a:t>The mathematics is not new;  the monitoring application may be.</a:t>
             </a:r>
           </a:p>
         </p:txBody>
